--- a/Project21.pptx
+++ b/Project21.pptx
@@ -109,6 +109,11 @@
       </a:defRPr>
     </a:lvl9pPr>
   </p:defaultTextStyle>
+  <p:extLst>
+    <p:ext uri="{EFAFB233-063F-42B5-8137-9DF3F51BA10A}">
+      <p15:sldGuideLst xmlns:p15="http://schemas.microsoft.com/office/powerpoint/2012/main"/>
+    </p:ext>
+  </p:extLst>
 </p:presentation>
 </file>
 
@@ -4047,121 +4052,165 @@
           <a:lstStyle/>
           <a:p>
             <a:r>
-              <a:rPr lang="en-GB" sz="2400" dirty="0"/>
+              <a:rPr lang="en-GB" sz="1800" dirty="0"/>
               <a:t>1. get data </a:t>
             </a:r>
           </a:p>
           <a:p>
             <a:pPr lvl="1"/>
             <a:r>
-              <a:rPr lang="en-GB" sz="2000" dirty="0"/>
-              <a:t>1.1 Correlation </a:t>
-            </a:r>
-          </a:p>
-          <a:p>
-            <a:r>
-              <a:rPr lang="en-GB" sz="2400" dirty="0"/>
-              <a:t>Test 2. Distribution Test </a:t>
+              <a:rPr lang="en-GB" sz="1800" dirty="0"/>
+              <a:t>1.1 Correlation Test </a:t>
+            </a:r>
+          </a:p>
+          <a:p>
+            <a:r>
+              <a:rPr lang="en-GB" sz="1800" dirty="0"/>
+              <a:t>2. Distribution Test </a:t>
             </a:r>
           </a:p>
           <a:p>
             <a:pPr lvl="1"/>
             <a:r>
-              <a:rPr lang="en-GB" sz="2000" dirty="0"/>
-              <a:t>2.1 Chi-squared </a:t>
-            </a:r>
-            <a:r>
-              <a:rPr lang="en-GB" sz="2000" dirty="0" err="1"/>
+              <a:rPr lang="en-GB" sz="1800" dirty="0"/>
+              <a:t>2.1 </a:t>
+            </a:r>
+            <a:r>
+              <a:rPr lang="en-GB" sz="1800" dirty="0" err="1"/>
+              <a:t>Equidistribution</a:t>
+            </a:r>
+            <a:r>
+              <a:rPr lang="en-GB" sz="1800" dirty="0"/>
+              <a:t> Test (</a:t>
+            </a:r>
+            <a:r>
+              <a:rPr lang="en-GB" sz="1800" dirty="0" err="1"/>
+              <a:t>Frequecy</a:t>
+            </a:r>
+            <a:r>
+              <a:rPr lang="en-GB" sz="1800" dirty="0"/>
+              <a:t> Test)</a:t>
+            </a:r>
+          </a:p>
+          <a:p>
+            <a:pPr lvl="2"/>
+            <a:r>
+              <a:rPr lang="en-GB" sz="1800" dirty="0"/>
+              <a:t>2.1.1 Chi-squared </a:t>
+            </a:r>
+            <a:r>
+              <a:rPr lang="en-GB" sz="1800" dirty="0" err="1"/>
               <a:t>Test（chisq.test</a:t>
             </a:r>
             <a:r>
-              <a:rPr lang="en-GB" sz="2000" dirty="0"/>
+              <a:rPr lang="en-GB" sz="1800" dirty="0"/>
               <a:t>） </a:t>
             </a:r>
           </a:p>
           <a:p>
+            <a:pPr lvl="3"/>
+            <a:r>
+              <a:rPr lang="en-GB" dirty="0"/>
+              <a:t>1）Test if 'X1' , 'X2' is uniform distribution. </a:t>
+            </a:r>
+          </a:p>
+          <a:p>
+            <a:pPr lvl="3"/>
+            <a:r>
+              <a:rPr lang="en-GB" dirty="0"/>
+              <a:t>2）Test if 'X1' and 'X2' is from same uniform distribution. </a:t>
+            </a:r>
+          </a:p>
+          <a:p>
+            <a:pPr lvl="2"/>
+            <a:r>
+              <a:rPr lang="en-GB" sz="1800" dirty="0"/>
+              <a:t>2.1.2 Kolmogorov–Smirnov test (</a:t>
+            </a:r>
+            <a:r>
+              <a:rPr lang="en-GB" sz="1800" dirty="0" err="1"/>
+              <a:t>ks.test</a:t>
+            </a:r>
+            <a:r>
+              <a:rPr lang="en-GB" sz="1800" dirty="0"/>
+              <a:t>) </a:t>
+            </a:r>
+          </a:p>
+          <a:p>
             <a:pPr lvl="1"/>
             <a:r>
-              <a:rPr lang="en-GB" sz="2000" dirty="0"/>
-              <a:t>2.2 Kolmogorov–Smirnov test (</a:t>
-            </a:r>
-            <a:r>
-              <a:rPr lang="en-GB" sz="2000" dirty="0" err="1"/>
-              <a:t>ks.test</a:t>
-            </a:r>
-            <a:r>
-              <a:rPr lang="en-GB" sz="2000" dirty="0"/>
+              <a:rPr lang="en-GB" sz="1800" dirty="0"/>
+              <a:t>2.2 Gap Test (</a:t>
+            </a:r>
+            <a:r>
+              <a:rPr lang="en-GB" sz="1800" dirty="0" err="1"/>
+              <a:t>gap.test</a:t>
+            </a:r>
+            <a:r>
+              <a:rPr lang="en-GB" sz="1800" dirty="0"/>
               <a:t>) </a:t>
             </a:r>
           </a:p>
           <a:p>
+            <a:pPr lvl="2"/>
+            <a:r>
+              <a:rPr lang="en-GB" sz="1800" dirty="0"/>
+              <a:t>1) From 0-0.5 </a:t>
+            </a:r>
+          </a:p>
+          <a:p>
+            <a:pPr lvl="2"/>
+            <a:r>
+              <a:rPr lang="en-GB" sz="1800" dirty="0"/>
+              <a:t>2) From 0.5-1.0 </a:t>
+            </a:r>
+          </a:p>
+          <a:p>
             <a:pPr lvl="1"/>
             <a:r>
-              <a:rPr lang="en-GB" sz="2000" dirty="0"/>
-              <a:t>2.3 Empirical Tests </a:t>
-            </a:r>
-          </a:p>
-          <a:p>
-            <a:pPr lvl="2"/>
-            <a:r>
-              <a:rPr lang="en-GB" sz="1600" dirty="0"/>
-              <a:t>2.3.1 Gap Test (</a:t>
-            </a:r>
-            <a:r>
-              <a:rPr lang="en-GB" sz="1600" dirty="0" err="1"/>
-              <a:t>gap.test</a:t>
-            </a:r>
-            <a:r>
-              <a:rPr lang="en-GB" sz="1600" dirty="0"/>
+              <a:rPr lang="en-GB" sz="1800" dirty="0"/>
+              <a:t>2.3 Serial Test (</a:t>
+            </a:r>
+            <a:r>
+              <a:rPr lang="en-GB" sz="1800" dirty="0" err="1"/>
+              <a:t>serial.test</a:t>
+            </a:r>
+            <a:r>
+              <a:rPr lang="en-GB" sz="1800" dirty="0"/>
               <a:t>) </a:t>
             </a:r>
           </a:p>
           <a:p>
-            <a:pPr lvl="2"/>
-            <a:r>
-              <a:rPr lang="en-GB" sz="1600" dirty="0"/>
-              <a:t>2.3.2 Serial Test (</a:t>
-            </a:r>
-            <a:r>
-              <a:rPr lang="en-GB" sz="1600" dirty="0" err="1"/>
-              <a:t>serial.test</a:t>
-            </a:r>
-            <a:r>
-              <a:rPr lang="en-GB" sz="1600" dirty="0"/>
-              <a:t>) </a:t>
-            </a:r>
-          </a:p>
-          <a:p>
-            <a:pPr lvl="2"/>
-            <a:r>
-              <a:rPr lang="en-GB" sz="1600" dirty="0"/>
-              <a:t>2.3.3 </a:t>
-            </a:r>
-            <a:r>
-              <a:rPr lang="en-GB" sz="1600" dirty="0" err="1"/>
+            <a:pPr lvl="1"/>
+            <a:r>
+              <a:rPr lang="en-GB" sz="1800" dirty="0"/>
+              <a:t>2.4 </a:t>
+            </a:r>
+            <a:r>
+              <a:rPr lang="en-GB" sz="1800" dirty="0" err="1"/>
               <a:t>Equidistribution</a:t>
             </a:r>
             <a:r>
-              <a:rPr lang="en-GB" sz="1600" dirty="0"/>
-              <a:t> Test (</a:t>
-            </a:r>
-            <a:r>
-              <a:rPr lang="en-GB" sz="1600" dirty="0" err="1"/>
+              <a:rPr lang="en-GB" sz="1800" dirty="0"/>
+              <a:t> Test (Use </a:t>
+            </a:r>
+            <a:r>
+              <a:rPr lang="en-GB" sz="1800" dirty="0" err="1"/>
               <a:t>Frequence</a:t>
             </a:r>
             <a:r>
-              <a:rPr lang="en-GB" sz="1600" dirty="0"/>
+              <a:rPr lang="en-GB" sz="1800" dirty="0"/>
               <a:t> Test-</a:t>
             </a:r>
             <a:r>
-              <a:rPr lang="en-GB" sz="1600" dirty="0" err="1"/>
+              <a:rPr lang="en-GB" sz="1800" dirty="0" err="1"/>
               <a:t>freq.test</a:t>
             </a:r>
             <a:r>
-              <a:rPr lang="en-GB" sz="1600" dirty="0"/>
+              <a:rPr lang="en-GB" sz="1800" dirty="0"/>
               <a:t>)</a:t>
             </a:r>
-            <a:endParaRPr lang="en-LU" sz="1600" dirty="0"/>
+            <a:endParaRPr lang="en-LU" sz="1800" dirty="0"/>
           </a:p>
         </p:txBody>
       </p:sp>
@@ -4285,10 +4334,10 @@
       </p:sp>
       <p:pic>
         <p:nvPicPr>
-          <p:cNvPr id="7" name="Picture 6" descr="A screenshot of a cell phone&#10;&#10;Description automatically generated">
-            <a:extLst>
-              <a:ext uri="{FF2B5EF4-FFF2-40B4-BE49-F238E27FC236}">
-                <a16:creationId xmlns:a16="http://schemas.microsoft.com/office/drawing/2014/main" id="{28107581-AD48-7D43-856C-77B88CB13943}"/>
+          <p:cNvPr id="5" name="Picture 4" descr="A screenshot of a map&#10;&#10;Description automatically generated">
+            <a:extLst>
+              <a:ext uri="{FF2B5EF4-FFF2-40B4-BE49-F238E27FC236}">
+                <a16:creationId xmlns:a16="http://schemas.microsoft.com/office/drawing/2014/main" id="{BF0ECFA3-B597-6445-AC81-2D035148DA16}"/>
               </a:ext>
             </a:extLst>
           </p:cNvPr>
@@ -4297,16 +4346,15 @@
           </p:cNvPicPr>
           <p:nvPr/>
         </p:nvPicPr>
-        <p:blipFill>
+        <p:blipFill rotWithShape="1">
           <a:blip r:embed="rId2"/>
-          <a:stretch>
-            <a:fillRect/>
-          </a:stretch>
+          <a:srcRect l="5264"/>
+          <a:stretch/>
         </p:blipFill>
         <p:spPr>
           <a:xfrm>
-            <a:off x="4039575" y="543697"/>
-            <a:ext cx="8152425" cy="1569339"/>
+            <a:off x="7925313" y="2825496"/>
+            <a:ext cx="3321807" cy="3392424"/>
           </a:xfrm>
           <a:prstGeom prst="rect">
             <a:avLst/>
@@ -4315,10 +4363,10 @@
       </p:pic>
       <p:pic>
         <p:nvPicPr>
-          <p:cNvPr id="5" name="Picture 4" descr="A screenshot of a map&#10;&#10;Description automatically generated">
-            <a:extLst>
-              <a:ext uri="{FF2B5EF4-FFF2-40B4-BE49-F238E27FC236}">
-                <a16:creationId xmlns:a16="http://schemas.microsoft.com/office/drawing/2014/main" id="{BF0ECFA3-B597-6445-AC81-2D035148DA16}"/>
+          <p:cNvPr id="6" name="Picture 5" descr="A screenshot of a cell phone&#10;&#10;Description automatically generated">
+            <a:extLst>
+              <a:ext uri="{FF2B5EF4-FFF2-40B4-BE49-F238E27FC236}">
+                <a16:creationId xmlns:a16="http://schemas.microsoft.com/office/drawing/2014/main" id="{D164705D-C241-5E47-A8A4-3CF45BDBB88F}"/>
               </a:ext>
             </a:extLst>
           </p:cNvPr>
@@ -4327,15 +4375,16 @@
           </p:cNvPicPr>
           <p:nvPr/>
         </p:nvPicPr>
-        <p:blipFill rotWithShape="1">
+        <p:blipFill>
           <a:blip r:embed="rId3"/>
-          <a:srcRect l="5264"/>
-          <a:stretch/>
+          <a:stretch>
+            <a:fillRect/>
+          </a:stretch>
         </p:blipFill>
         <p:spPr>
           <a:xfrm>
-            <a:off x="7925313" y="2825496"/>
-            <a:ext cx="3321807" cy="3392424"/>
+            <a:off x="3793523" y="526061"/>
+            <a:ext cx="8257499" cy="1586974"/>
           </a:xfrm>
           <a:prstGeom prst="rect">
             <a:avLst/>
